--- a/Presentation/Global AI Adoption & Workforce Impact DatasetFinal.pptx
+++ b/Presentation/Global AI Adoption & Workforce Impact DatasetFinal.pptx
@@ -8786,13 +8786,8 @@
             <a:pPr algn="l"/>
             <a:r>
               <a:rPr lang="en-US" sz="2000" dirty="0"/>
-              <a:t>CAO</a:t>
-            </a:r>
-            <a:r>
-              <a:rPr lang="en-US" sz="2000"/>
-              <a:t>: 11JUN26</a:t>
-            </a:r>
-            <a:endParaRPr lang="en-US" sz="2000" dirty="0"/>
+              <a:t>CAO: 11JUN26</a:t>
+            </a:r>
           </a:p>
         </p:txBody>
       </p:sp>
